--- a/assets/readme/examples/financial-report.pptx
+++ b/assets/readme/examples/financial-report.pptx
@@ -3158,7 +3158,7 @@
         <p:spPr>
           <a:xfrm>
             <a:off x="2404800" y="183411"/>
-            <a:ext cx="2214232" cy="223202"/>
+            <a:ext cx="2348154" cy="223202"/>
           </a:xfrm>
           <a:prstGeom prst="rect">
             <a:avLst/>
@@ -3204,7 +3204,7 @@
         <p:spPr>
           <a:xfrm>
             <a:off x="2404800" y="432013"/>
-            <a:ext cx="2669807" cy="223202"/>
+            <a:ext cx="2883840" cy="223202"/>
           </a:xfrm>
           <a:prstGeom prst="rect">
             <a:avLst/>
@@ -4109,8 +4109,8 @@
         </p:nvSpPr>
         <p:spPr>
           <a:xfrm>
-            <a:off x="2588899" y="1513724"/>
-            <a:ext cx="2383472" cy="176212"/>
+            <a:off x="2525463" y="1513724"/>
+            <a:ext cx="2510346" cy="176212"/>
           </a:xfrm>
           <a:prstGeom prst="rect">
             <a:avLst/>
@@ -6883,8 +6883,8 @@
         </p:nvSpPr>
         <p:spPr>
           <a:xfrm>
-            <a:off x="3299147" y="3287034"/>
-            <a:ext cx="962977" cy="146844"/>
+            <a:off x="3255173" y="3287034"/>
+            <a:ext cx="1050925" cy="146844"/>
           </a:xfrm>
           <a:prstGeom prst="rect">
             <a:avLst/>
@@ -6974,8 +6974,8 @@
         </p:nvSpPr>
         <p:spPr>
           <a:xfrm>
-            <a:off x="1254984" y="3754945"/>
-            <a:ext cx="870902" cy="129222"/>
+            <a:off x="1231724" y="3754945"/>
+            <a:ext cx="917423" cy="129222"/>
           </a:xfrm>
           <a:prstGeom prst="rect">
             <a:avLst/>
@@ -7414,8 +7414,8 @@
         </p:nvSpPr>
         <p:spPr>
           <a:xfrm>
-            <a:off x="4535265" y="3754945"/>
-            <a:ext cx="1336942" cy="129222"/>
+            <a:off x="4492935" y="3754945"/>
+            <a:ext cx="1421600" cy="129222"/>
           </a:xfrm>
           <a:prstGeom prst="rect">
             <a:avLst/>
@@ -9339,8 +9339,8 @@
         </p:nvSpPr>
         <p:spPr>
           <a:xfrm>
-            <a:off x="5055078" y="5535168"/>
-            <a:ext cx="1297965" cy="129222"/>
+            <a:off x="5016381" y="5535168"/>
+            <a:ext cx="1375359" cy="129222"/>
           </a:xfrm>
           <a:prstGeom prst="rect">
             <a:avLst/>
@@ -11024,8 +11024,8 @@
         </p:nvSpPr>
         <p:spPr>
           <a:xfrm>
-            <a:off x="2814007" y="7680123"/>
-            <a:ext cx="1933258" cy="146844"/>
+            <a:off x="2734473" y="7680123"/>
+            <a:ext cx="2092325" cy="146844"/>
           </a:xfrm>
           <a:prstGeom prst="rect">
             <a:avLst/>
@@ -11115,8 +11115,8 @@
         </p:nvSpPr>
         <p:spPr>
           <a:xfrm>
-            <a:off x="1743810" y="8148034"/>
-            <a:ext cx="560349" cy="129222"/>
+            <a:off x="1732215" y="8148034"/>
+            <a:ext cx="583540" cy="129222"/>
           </a:xfrm>
           <a:prstGeom prst="rect">
             <a:avLst/>
@@ -12121,8 +12121,8 @@
         </p:nvSpPr>
         <p:spPr>
           <a:xfrm>
-            <a:off x="4911633" y="8148034"/>
-            <a:ext cx="1251306" cy="129222"/>
+            <a:off x="4861341" y="8148034"/>
+            <a:ext cx="1351890" cy="129222"/>
           </a:xfrm>
           <a:prstGeom prst="rect">
             <a:avLst/>

--- a/assets/readme/examples/financial-report.pptx
+++ b/assets/readme/examples/financial-report.pptx
@@ -11514,7 +11514,31 @@
       </p:sp>
       <p:sp>
         <p:nvSpPr>
-          <p:cNvPr name="GraphCompose Text Line" id="146"/>
+          <p:cNvPr name="AutoShape 146" id="146"/>
+          <p:cNvSpPr/>
+          <p:nvPr/>
+        </p:nvSpPr>
+        <p:spPr>
+          <a:xfrm>
+            <a:off x="835290" y="8796433"/>
+            <a:ext cx="398844" cy="119380"/>
+          </a:xfrm>
+          <a:prstGeom prst="roundRect">
+            <a:avLst>
+              <a:gd name="adj" fmla="val 21277"/>
+            </a:avLst>
+          </a:prstGeom>
+          <a:solidFill>
+            <a:srgbClr val="FFFFFF"/>
+          </a:solidFill>
+          <a:ln>
+            <a:noFill/>
+          </a:ln>
+        </p:spPr>
+      </p:sp>
+      <p:sp>
+        <p:nvSpPr>
+          <p:cNvPr name="GraphCompose Text Line" id="147"/>
           <p:cNvSpPr txBox="true"/>
           <p:nvPr/>
         </p:nvSpPr>
@@ -11560,7 +11584,7 @@
       </p:sp>
       <p:sp>
         <p:nvSpPr>
-          <p:cNvPr name="AutoShape 147" id="147"/>
+          <p:cNvPr name="AutoShape 148" id="148"/>
           <p:cNvSpPr/>
           <p:nvPr/>
         </p:nvSpPr>
@@ -11584,7 +11608,31 @@
       </p:sp>
       <p:sp>
         <p:nvSpPr>
-          <p:cNvPr name="GraphCompose Text Line" id="148"/>
+          <p:cNvPr name="AutoShape 149" id="149"/>
+          <p:cNvSpPr/>
+          <p:nvPr/>
+        </p:nvSpPr>
+        <p:spPr>
+          <a:xfrm>
+            <a:off x="1397376" y="8769382"/>
+            <a:ext cx="398844" cy="119380"/>
+          </a:xfrm>
+          <a:prstGeom prst="roundRect">
+            <a:avLst>
+              <a:gd name="adj" fmla="val 21277"/>
+            </a:avLst>
+          </a:prstGeom>
+          <a:solidFill>
+            <a:srgbClr val="FFFFFF"/>
+          </a:solidFill>
+          <a:ln>
+            <a:noFill/>
+          </a:ln>
+        </p:spPr>
+      </p:sp>
+      <p:sp>
+        <p:nvSpPr>
+          <p:cNvPr name="GraphCompose Text Line" id="150"/>
           <p:cNvSpPr txBox="true"/>
           <p:nvPr/>
         </p:nvSpPr>
@@ -11630,7 +11678,7 @@
       </p:sp>
       <p:sp>
         <p:nvSpPr>
-          <p:cNvPr name="AutoShape 149" id="149"/>
+          <p:cNvPr name="AutoShape 151" id="151"/>
           <p:cNvSpPr/>
           <p:nvPr/>
         </p:nvSpPr>
@@ -11654,7 +11702,31 @@
       </p:sp>
       <p:sp>
         <p:nvSpPr>
-          <p:cNvPr name="GraphCompose Text Line" id="150"/>
+          <p:cNvPr name="AutoShape 152" id="152"/>
+          <p:cNvSpPr/>
+          <p:nvPr/>
+        </p:nvSpPr>
+        <p:spPr>
+          <a:xfrm>
+            <a:off x="1959463" y="8742331"/>
+            <a:ext cx="398844" cy="119380"/>
+          </a:xfrm>
+          <a:prstGeom prst="roundRect">
+            <a:avLst>
+              <a:gd name="adj" fmla="val 21277"/>
+            </a:avLst>
+          </a:prstGeom>
+          <a:solidFill>
+            <a:srgbClr val="FFFFFF"/>
+          </a:solidFill>
+          <a:ln>
+            <a:noFill/>
+          </a:ln>
+        </p:spPr>
+      </p:sp>
+      <p:sp>
+        <p:nvSpPr>
+          <p:cNvPr name="GraphCompose Text Line" id="153"/>
           <p:cNvSpPr txBox="true"/>
           <p:nvPr/>
         </p:nvSpPr>
@@ -11700,7 +11772,7 @@
       </p:sp>
       <p:sp>
         <p:nvSpPr>
-          <p:cNvPr name="AutoShape 151" id="151"/>
+          <p:cNvPr name="AutoShape 154" id="154"/>
           <p:cNvSpPr/>
           <p:nvPr/>
         </p:nvSpPr>
@@ -11724,7 +11796,31 @@
       </p:sp>
       <p:sp>
         <p:nvSpPr>
-          <p:cNvPr name="GraphCompose Text Line" id="152"/>
+          <p:cNvPr name="AutoShape 155" id="155"/>
+          <p:cNvSpPr/>
+          <p:nvPr/>
+        </p:nvSpPr>
+        <p:spPr>
+          <a:xfrm>
+            <a:off x="2521549" y="8753151"/>
+            <a:ext cx="398844" cy="119380"/>
+          </a:xfrm>
+          <a:prstGeom prst="roundRect">
+            <a:avLst>
+              <a:gd name="adj" fmla="val 21277"/>
+            </a:avLst>
+          </a:prstGeom>
+          <a:solidFill>
+            <a:srgbClr val="FFFFFF"/>
+          </a:solidFill>
+          <a:ln>
+            <a:noFill/>
+          </a:ln>
+        </p:spPr>
+      </p:sp>
+      <p:sp>
+        <p:nvSpPr>
+          <p:cNvPr name="GraphCompose Text Line" id="156"/>
           <p:cNvSpPr txBox="true"/>
           <p:nvPr/>
         </p:nvSpPr>
@@ -11770,7 +11866,7 @@
       </p:sp>
       <p:sp>
         <p:nvSpPr>
-          <p:cNvPr name="AutoShape 153" id="153"/>
+          <p:cNvPr name="AutoShape 157" id="157"/>
           <p:cNvSpPr/>
           <p:nvPr/>
         </p:nvSpPr>
@@ -11794,7 +11890,31 @@
       </p:sp>
       <p:sp>
         <p:nvSpPr>
-          <p:cNvPr name="GraphCompose Text Line" id="154"/>
+          <p:cNvPr name="AutoShape 158" id="158"/>
+          <p:cNvSpPr/>
+          <p:nvPr/>
+        </p:nvSpPr>
+        <p:spPr>
+          <a:xfrm>
+            <a:off x="3083635" y="8688229"/>
+            <a:ext cx="398844" cy="119380"/>
+          </a:xfrm>
+          <a:prstGeom prst="roundRect">
+            <a:avLst>
+              <a:gd name="adj" fmla="val 21277"/>
+            </a:avLst>
+          </a:prstGeom>
+          <a:solidFill>
+            <a:srgbClr val="FFFFFF"/>
+          </a:solidFill>
+          <a:ln>
+            <a:noFill/>
+          </a:ln>
+        </p:spPr>
+      </p:sp>
+      <p:sp>
+        <p:nvSpPr>
+          <p:cNvPr name="GraphCompose Text Line" id="159"/>
           <p:cNvSpPr txBox="true"/>
           <p:nvPr/>
         </p:nvSpPr>
@@ -11840,7 +11960,7 @@
       </p:sp>
       <p:sp>
         <p:nvSpPr>
-          <p:cNvPr name="GraphCompose Text Line" id="155"/>
+          <p:cNvPr name="GraphCompose Text Line" id="160"/>
           <p:cNvSpPr txBox="true"/>
           <p:nvPr/>
         </p:nvSpPr>
@@ -11886,7 +12006,7 @@
       </p:sp>
       <p:sp>
         <p:nvSpPr>
-          <p:cNvPr name="GraphCompose Text Line" id="156"/>
+          <p:cNvPr name="GraphCompose Text Line" id="161"/>
           <p:cNvSpPr txBox="true"/>
           <p:nvPr/>
         </p:nvSpPr>
@@ -11932,7 +12052,7 @@
       </p:sp>
       <p:sp>
         <p:nvSpPr>
-          <p:cNvPr name="GraphCompose Text Line" id="157"/>
+          <p:cNvPr name="GraphCompose Text Line" id="162"/>
           <p:cNvSpPr txBox="true"/>
           <p:nvPr/>
         </p:nvSpPr>
@@ -11978,7 +12098,7 @@
       </p:sp>
       <p:sp>
         <p:nvSpPr>
-          <p:cNvPr name="GraphCompose Text Line" id="158"/>
+          <p:cNvPr name="GraphCompose Text Line" id="163"/>
           <p:cNvSpPr txBox="true"/>
           <p:nvPr/>
         </p:nvSpPr>
@@ -12024,7 +12144,7 @@
       </p:sp>
       <p:sp>
         <p:nvSpPr>
-          <p:cNvPr name="GraphCompose Text Line" id="159"/>
+          <p:cNvPr name="GraphCompose Text Line" id="164"/>
           <p:cNvSpPr txBox="true"/>
           <p:nvPr/>
         </p:nvSpPr>
@@ -12070,7 +12190,7 @@
       </p:sp>
       <p:sp>
         <p:nvSpPr>
-          <p:cNvPr name="AutoShape 160" id="160"/>
+          <p:cNvPr name="AutoShape 165" id="165"/>
           <p:cNvSpPr/>
           <p:nvPr/>
         </p:nvSpPr>
@@ -12094,7 +12214,7 @@
       </p:sp>
       <p:cxnSp>
         <p:nvCxnSpPr>
-          <p:cNvPr name="Connector 161" id="161"/>
+          <p:cNvPr name="Connector 166" id="166"/>
           <p:cNvCxnSpPr/>
           <p:nvPr/>
         </p:nvCxnSpPr>
@@ -12115,7 +12235,7 @@
       </p:cxnSp>
       <p:sp>
         <p:nvSpPr>
-          <p:cNvPr name="GraphCompose Text Line" id="162"/>
+          <p:cNvPr name="GraphCompose Text Line" id="167"/>
           <p:cNvSpPr txBox="true"/>
           <p:nvPr/>
         </p:nvSpPr>
@@ -12161,7 +12281,7 @@
       </p:sp>
       <p:cxnSp>
         <p:nvCxnSpPr>
-          <p:cNvPr name="Connector 163" id="163"/>
+          <p:cNvPr name="Connector 168" id="168"/>
           <p:cNvCxnSpPr/>
           <p:nvPr/>
         </p:nvCxnSpPr>
@@ -12182,7 +12302,7 @@
       </p:cxnSp>
       <p:sp>
         <p:nvSpPr>
-          <p:cNvPr name="GraphCompose Text Line" id="164"/>
+          <p:cNvPr name="GraphCompose Text Line" id="169"/>
           <p:cNvSpPr txBox="true"/>
           <p:nvPr/>
         </p:nvSpPr>
@@ -12228,7 +12348,7 @@
       </p:sp>
       <p:cxnSp>
         <p:nvCxnSpPr>
-          <p:cNvPr name="Connector 165" id="165"/>
+          <p:cNvPr name="Connector 170" id="170"/>
           <p:cNvCxnSpPr/>
           <p:nvPr/>
         </p:nvCxnSpPr>
@@ -12249,7 +12369,7 @@
       </p:cxnSp>
       <p:sp>
         <p:nvSpPr>
-          <p:cNvPr name="GraphCompose Text Line" id="166"/>
+          <p:cNvPr name="GraphCompose Text Line" id="171"/>
           <p:cNvSpPr txBox="true"/>
           <p:nvPr/>
         </p:nvSpPr>
@@ -12295,7 +12415,7 @@
       </p:sp>
       <p:cxnSp>
         <p:nvCxnSpPr>
-          <p:cNvPr name="Connector 167" id="167"/>
+          <p:cNvPr name="Connector 172" id="172"/>
           <p:cNvCxnSpPr/>
           <p:nvPr/>
         </p:nvCxnSpPr>
@@ -12316,7 +12436,7 @@
       </p:cxnSp>
       <p:sp>
         <p:nvSpPr>
-          <p:cNvPr name="GraphCompose Text Line" id="168"/>
+          <p:cNvPr name="GraphCompose Text Line" id="173"/>
           <p:cNvSpPr txBox="true"/>
           <p:nvPr/>
         </p:nvSpPr>
@@ -12362,7 +12482,7 @@
       </p:sp>
       <p:cxnSp>
         <p:nvCxnSpPr>
-          <p:cNvPr name="Connector 169" id="169"/>
+          <p:cNvPr name="Connector 174" id="174"/>
           <p:cNvCxnSpPr/>
           <p:nvPr/>
         </p:nvCxnSpPr>
@@ -12383,7 +12503,7 @@
       </p:cxnSp>
       <p:sp>
         <p:nvSpPr>
-          <p:cNvPr name="GraphCompose Text Line" id="170"/>
+          <p:cNvPr name="GraphCompose Text Line" id="175"/>
           <p:cNvSpPr txBox="true"/>
           <p:nvPr/>
         </p:nvSpPr>
@@ -12429,7 +12549,7 @@
       </p:sp>
       <p:sp>
         <p:nvSpPr>
-          <p:cNvPr name="AutoShape 171" id="171"/>
+          <p:cNvPr name="AutoShape 176" id="176"/>
           <p:cNvSpPr/>
           <p:nvPr/>
         </p:nvSpPr>
@@ -12451,7 +12571,7 @@
       </p:sp>
       <p:sp>
         <p:nvSpPr>
-          <p:cNvPr name="AutoShape 172" id="172"/>
+          <p:cNvPr name="AutoShape 177" id="177"/>
           <p:cNvSpPr/>
           <p:nvPr/>
         </p:nvSpPr>
@@ -12473,7 +12593,7 @@
       </p:sp>
       <p:sp>
         <p:nvSpPr>
-          <p:cNvPr name="GraphCompose Text Line" id="173"/>
+          <p:cNvPr name="GraphCompose Text Line" id="178"/>
           <p:cNvSpPr txBox="true"/>
           <p:nvPr/>
         </p:nvSpPr>
@@ -12519,7 +12639,7 @@
       </p:sp>
       <p:sp>
         <p:nvSpPr>
-          <p:cNvPr name="AutoShape 174" id="174"/>
+          <p:cNvPr name="AutoShape 179" id="179"/>
           <p:cNvSpPr/>
           <p:nvPr/>
         </p:nvSpPr>
@@ -12541,7 +12661,7 @@
       </p:sp>
       <p:sp>
         <p:nvSpPr>
-          <p:cNvPr name="AutoShape 175" id="175"/>
+          <p:cNvPr name="AutoShape 180" id="180"/>
           <p:cNvSpPr/>
           <p:nvPr/>
         </p:nvSpPr>
@@ -12563,7 +12683,7 @@
       </p:sp>
       <p:sp>
         <p:nvSpPr>
-          <p:cNvPr name="GraphCompose Text Line" id="176"/>
+          <p:cNvPr name="GraphCompose Text Line" id="181"/>
           <p:cNvSpPr txBox="true"/>
           <p:nvPr/>
         </p:nvSpPr>
@@ -12609,7 +12729,7 @@
       </p:sp>
       <p:sp>
         <p:nvSpPr>
-          <p:cNvPr name="AutoShape 177" id="177"/>
+          <p:cNvPr name="AutoShape 182" id="182"/>
           <p:cNvSpPr/>
           <p:nvPr/>
         </p:nvSpPr>
@@ -12631,7 +12751,7 @@
       </p:sp>
       <p:sp>
         <p:nvSpPr>
-          <p:cNvPr name="AutoShape 178" id="178"/>
+          <p:cNvPr name="AutoShape 183" id="183"/>
           <p:cNvSpPr/>
           <p:nvPr/>
         </p:nvSpPr>
@@ -12653,7 +12773,7 @@
       </p:sp>
       <p:sp>
         <p:nvSpPr>
-          <p:cNvPr name="GraphCompose Text Line" id="179"/>
+          <p:cNvPr name="GraphCompose Text Line" id="184"/>
           <p:cNvSpPr txBox="true"/>
           <p:nvPr/>
         </p:nvSpPr>
@@ -12699,7 +12819,7 @@
       </p:sp>
       <p:sp>
         <p:nvSpPr>
-          <p:cNvPr name="AutoShape 180" id="180"/>
+          <p:cNvPr name="AutoShape 185" id="185"/>
           <p:cNvSpPr/>
           <p:nvPr/>
         </p:nvSpPr>
@@ -12721,7 +12841,7 @@
       </p:sp>
       <p:sp>
         <p:nvSpPr>
-          <p:cNvPr name="AutoShape 181" id="181"/>
+          <p:cNvPr name="AutoShape 186" id="186"/>
           <p:cNvSpPr/>
           <p:nvPr/>
         </p:nvSpPr>
@@ -12743,7 +12863,7 @@
       </p:sp>
       <p:sp>
         <p:nvSpPr>
-          <p:cNvPr name="GraphCompose Text Line" id="182"/>
+          <p:cNvPr name="GraphCompose Text Line" id="187"/>
           <p:cNvSpPr txBox="true"/>
           <p:nvPr/>
         </p:nvSpPr>
@@ -12789,7 +12909,7 @@
       </p:sp>
       <p:sp>
         <p:nvSpPr>
-          <p:cNvPr name="AutoShape 183" id="183"/>
+          <p:cNvPr name="AutoShape 188" id="188"/>
           <p:cNvSpPr/>
           <p:nvPr/>
         </p:nvSpPr>
@@ -12811,7 +12931,7 @@
       </p:sp>
       <p:sp>
         <p:nvSpPr>
-          <p:cNvPr name="AutoShape 184" id="184"/>
+          <p:cNvPr name="AutoShape 189" id="189"/>
           <p:cNvSpPr/>
           <p:nvPr/>
         </p:nvSpPr>
@@ -12833,7 +12953,7 @@
       </p:sp>
       <p:sp>
         <p:nvSpPr>
-          <p:cNvPr name="GraphCompose Text Line" id="185"/>
+          <p:cNvPr name="GraphCompose Text Line" id="190"/>
           <p:cNvSpPr txBox="true"/>
           <p:nvPr/>
         </p:nvSpPr>
@@ -12879,7 +12999,7 @@
       </p:sp>
       <p:sp>
         <p:nvSpPr>
-          <p:cNvPr name="AutoShape 186" id="186"/>
+          <p:cNvPr name="AutoShape 191" id="191"/>
           <p:cNvSpPr/>
           <p:nvPr/>
         </p:nvSpPr>
@@ -12901,7 +13021,7 @@
       </p:sp>
       <p:sp>
         <p:nvSpPr>
-          <p:cNvPr name="AutoShape 187" id="187"/>
+          <p:cNvPr name="AutoShape 192" id="192"/>
           <p:cNvSpPr/>
           <p:nvPr/>
         </p:nvSpPr>
@@ -12923,7 +13043,7 @@
       </p:sp>
       <p:sp>
         <p:nvSpPr>
-          <p:cNvPr name="GraphCompose Text Line" id="188"/>
+          <p:cNvPr name="GraphCompose Text Line" id="193"/>
           <p:cNvSpPr txBox="true"/>
           <p:nvPr/>
         </p:nvSpPr>
@@ -12969,7 +13089,7 @@
       </p:sp>
       <p:sp>
         <p:nvSpPr>
-          <p:cNvPr name="AutoShape 189" id="189"/>
+          <p:cNvPr name="AutoShape 194" id="194"/>
           <p:cNvSpPr/>
           <p:nvPr/>
         </p:nvSpPr>
@@ -12993,7 +13113,7 @@
       </p:sp>
       <p:sp>
         <p:nvSpPr>
-          <p:cNvPr name="GraphCompose Text Line" id="190"/>
+          <p:cNvPr name="GraphCompose Text Line" id="195"/>
           <p:cNvSpPr txBox="true"/>
           <p:nvPr/>
         </p:nvSpPr>
@@ -13039,7 +13159,7 @@
       </p:sp>
       <p:sp>
         <p:nvSpPr>
-          <p:cNvPr name="AutoShape 191" id="191"/>
+          <p:cNvPr name="AutoShape 196" id="196"/>
           <p:cNvSpPr/>
           <p:nvPr/>
         </p:nvSpPr>
@@ -13063,7 +13183,7 @@
       </p:sp>
       <p:sp>
         <p:nvSpPr>
-          <p:cNvPr name="GraphCompose Text Line" id="192"/>
+          <p:cNvPr name="GraphCompose Text Line" id="197"/>
           <p:cNvSpPr txBox="true"/>
           <p:nvPr/>
         </p:nvSpPr>
